--- a/AI漫剧制作课程/PPT课件/模块02-大语言模型与AI剧本创作.pptx
+++ b/AI漫剧制作课程/PPT课件/模块02-大语言模型与AI剧本创作.pptx
@@ -11626,7 +11626,7 @@
               </a:defRPr>
             </a:pPr>
             <a:r>
-              <a:t>🛠️  本模块实操任务</a:t>
+              <a:t>◆  本模块实操任务</a:t>
             </a:r>
           </a:p>
         </p:txBody>
@@ -15393,7 +15393,7 @@
               </a:defRPr>
             </a:pPr>
             <a:r>
-              <a:t>✓</a:t>
+              <a:t>◆</a:t>
             </a:r>
           </a:p>
         </p:txBody>
@@ -17510,7 +17510,7 @@
               </a:defRPr>
             </a:pPr>
             <a:r>
-              <a:t>📋  本节内容</a:t>
+              <a:t>§  本节内容</a:t>
             </a:r>
           </a:p>
         </p:txBody>
@@ -28866,7 +28866,7 @@
               </a:defRPr>
             </a:pPr>
             <a:r>
-              <a:t>🤖 五大AI模型速览</a:t>
+              <a:t>◉ 五大AI模型速览</a:t>
             </a:r>
           </a:p>
         </p:txBody>
@@ -29379,7 +29379,7 @@
               </a:defRPr>
             </a:pPr>
             <a:r>
-              <a:t>🔵</a:t>
+              <a:t>●</a:t>
             </a:r>
           </a:p>
         </p:txBody>
@@ -29876,7 +29876,7 @@
               </a:defRPr>
             </a:pPr>
             <a:r>
-              <a:t>🟢</a:t>
+              <a:t>●</a:t>
             </a:r>
           </a:p>
         </p:txBody>
@@ -30373,7 +30373,7 @@
               </a:defRPr>
             </a:pPr>
             <a:r>
-              <a:t>🟠</a:t>
+              <a:t>●</a:t>
             </a:r>
           </a:p>
         </p:txBody>
@@ -30870,7 +30870,7 @@
               </a:defRPr>
             </a:pPr>
             <a:r>
-              <a:t>🔴</a:t>
+              <a:t>●</a:t>
             </a:r>
           </a:p>
         </p:txBody>
@@ -31367,7 +31367,7 @@
               </a:defRPr>
             </a:pPr>
             <a:r>
-              <a:t>🟣</a:t>
+              <a:t>●</a:t>
             </a:r>
           </a:p>
         </p:txBody>
